--- a/koreatech-db/weeks/01주차_강의_소개와_데이터베이스_개요.pptx
+++ b/koreatech-db/weeks/01주차_강의_소개와_데이터베이스_개요.pptx
@@ -15523,9 +15523,9 @@
                 <a:solidFill>
                   <a:srgbClr val="7A869C"/>
                 </a:solidFill>
-                <a:latin typeface="나눔고딕코딩"/>
-                <a:ea typeface="나눔고딕코딩"/>
-                <a:cs typeface="나눔고딕코딩"/>
+                <a:latin typeface="D2Coding"/>
+                <a:ea typeface="D2Coding"/>
+                <a:cs typeface="D2Coding"/>
               </a:rPr>
               <a:t>1</a:t>
             </a:r>
@@ -15541,9 +15541,9 @@
                 <a:solidFill>
                   <a:srgbClr val="7A869C"/>
                 </a:solidFill>
-                <a:latin typeface="나눔고딕코딩"/>
-                <a:ea typeface="나눔고딕코딩"/>
-                <a:cs typeface="나눔고딕코딩"/>
+                <a:latin typeface="D2Coding"/>
+                <a:ea typeface="D2Coding"/>
+                <a:cs typeface="D2Coding"/>
               </a:rPr>
               <a:t>2</a:t>
             </a:r>
@@ -15559,9 +15559,9 @@
                 <a:solidFill>
                   <a:srgbClr val="7A869C"/>
                 </a:solidFill>
-                <a:latin typeface="나눔고딕코딩"/>
-                <a:ea typeface="나눔고딕코딩"/>
-                <a:cs typeface="나눔고딕코딩"/>
+                <a:latin typeface="D2Coding"/>
+                <a:ea typeface="D2Coding"/>
+                <a:cs typeface="D2Coding"/>
               </a:rPr>
               <a:t>3</a:t>
             </a:r>
@@ -15577,9 +15577,9 @@
                 <a:solidFill>
                   <a:srgbClr val="7A869C"/>
                 </a:solidFill>
-                <a:latin typeface="나눔고딕코딩"/>
-                <a:ea typeface="나눔고딕코딩"/>
-                <a:cs typeface="나눔고딕코딩"/>
+                <a:latin typeface="D2Coding"/>
+                <a:ea typeface="D2Coding"/>
+                <a:cs typeface="D2Coding"/>
               </a:rPr>
               <a:t>4</a:t>
             </a:r>
@@ -15595,9 +15595,9 @@
                 <a:solidFill>
                   <a:srgbClr val="7A869C"/>
                 </a:solidFill>
-                <a:latin typeface="나눔고딕코딩"/>
-                <a:ea typeface="나눔고딕코딩"/>
-                <a:cs typeface="나눔고딕코딩"/>
+                <a:latin typeface="D2Coding"/>
+                <a:ea typeface="D2Coding"/>
+                <a:cs typeface="D2Coding"/>
               </a:rPr>
               <a:t>5</a:t>
             </a:r>
@@ -15613,9 +15613,9 @@
                 <a:solidFill>
                   <a:srgbClr val="7A869C"/>
                 </a:solidFill>
-                <a:latin typeface="나눔고딕코딩"/>
-                <a:ea typeface="나눔고딕코딩"/>
-                <a:cs typeface="나눔고딕코딩"/>
+                <a:latin typeface="D2Coding"/>
+                <a:ea typeface="D2Coding"/>
+                <a:cs typeface="D2Coding"/>
               </a:rPr>
               <a:t>6</a:t>
             </a:r>
@@ -15631,9 +15631,9 @@
                 <a:solidFill>
                   <a:srgbClr val="7A869C"/>
                 </a:solidFill>
-                <a:latin typeface="나눔고딕코딩"/>
-                <a:ea typeface="나눔고딕코딩"/>
-                <a:cs typeface="나눔고딕코딩"/>
+                <a:latin typeface="D2Coding"/>
+                <a:ea typeface="D2Coding"/>
+                <a:cs typeface="D2Coding"/>
               </a:rPr>
               <a:t>7</a:t>
             </a:r>
@@ -15672,9 +15672,9 @@
                 <a:solidFill>
                   <a:srgbClr val="E6EAF2"/>
                 </a:solidFill>
-                <a:latin typeface="나눔고딕코딩"/>
-                <a:ea typeface="나눔고딕코딩"/>
-                <a:cs typeface="나눔고딕코딩"/>
+                <a:latin typeface="D2Coding"/>
+                <a:ea typeface="D2Coding"/>
+                <a:cs typeface="D2Coding"/>
               </a:rPr>
               <a:t># 터미널에 그대로 붙여 넣고 Enter (zsh 기준, macOS 기본 셸)</a:t>
             </a:r>
@@ -15690,9 +15690,9 @@
                 <a:solidFill>
                   <a:srgbClr val="E6EAF2"/>
                 </a:solidFill>
-                <a:latin typeface="나눔고딕코딩"/>
-                <a:ea typeface="나눔고딕코딩"/>
-                <a:cs typeface="나눔고딕코딩"/>
+                <a:latin typeface="D2Coding"/>
+                <a:ea typeface="D2Coding"/>
+                <a:cs typeface="D2Coding"/>
               </a:rPr>
               <a:t>echo 'export PATH="/usr/local/mysql/bin:$PATH"' &gt;&gt; ~/.zshrc</a:t>
             </a:r>
@@ -15708,9 +15708,9 @@
                 <a:solidFill>
                   <a:srgbClr val="E6EAF2"/>
                 </a:solidFill>
-                <a:latin typeface="나눔고딕코딩"/>
-                <a:ea typeface="나눔고딕코딩"/>
-                <a:cs typeface="나눔고딕코딩"/>
+                <a:latin typeface="D2Coding"/>
+                <a:ea typeface="D2Coding"/>
+                <a:cs typeface="D2Coding"/>
               </a:rPr>
               <a:t/>
             </a:r>
@@ -15726,9 +15726,9 @@
                 <a:solidFill>
                   <a:srgbClr val="E6EAF2"/>
                 </a:solidFill>
-                <a:latin typeface="나눔고딕코딩"/>
-                <a:ea typeface="나눔고딕코딩"/>
-                <a:cs typeface="나눔고딕코딩"/>
+                <a:latin typeface="D2Coding"/>
+                <a:ea typeface="D2Coding"/>
+                <a:cs typeface="D2Coding"/>
               </a:rPr>
               <a:t># 터미널을 새로 열고 확인</a:t>
             </a:r>
@@ -15744,9 +15744,9 @@
                 <a:solidFill>
                   <a:srgbClr val="E6EAF2"/>
                 </a:solidFill>
-                <a:latin typeface="나눔고딕코딩"/>
-                <a:ea typeface="나눔고딕코딩"/>
-                <a:cs typeface="나눔고딕코딩"/>
+                <a:latin typeface="D2Coding"/>
+                <a:ea typeface="D2Coding"/>
+                <a:cs typeface="D2Coding"/>
               </a:rPr>
               <a:t>uname -m            # arm64 = Apple Silicon, x86_64 = Intel</a:t>
             </a:r>
@@ -15762,9 +15762,9 @@
                 <a:solidFill>
                   <a:srgbClr val="E6EAF2"/>
                 </a:solidFill>
-                <a:latin typeface="나눔고딕코딩"/>
-                <a:ea typeface="나눔고딕코딩"/>
-                <a:cs typeface="나눔고딕코딩"/>
+                <a:latin typeface="D2Coding"/>
+                <a:ea typeface="D2Coding"/>
+                <a:cs typeface="D2Coding"/>
               </a:rPr>
               <a:t>mysql --version     # mysql  Ver 8.0.xx for macos.. on arm64(또는 x86_64)</a:t>
             </a:r>
@@ -15780,9 +15780,9 @@
                 <a:solidFill>
                   <a:srgbClr val="E6EAF2"/>
                 </a:solidFill>
-                <a:latin typeface="나눔고딕코딩"/>
-                <a:ea typeface="나눔고딕코딩"/>
-                <a:cs typeface="나눔고딕코딩"/>
+                <a:latin typeface="D2Coding"/>
+                <a:ea typeface="D2Coding"/>
+                <a:cs typeface="D2Coding"/>
               </a:rPr>
               <a:t>mysql -u root -p</a:t>
             </a:r>
@@ -20328,9 +20328,9 @@
                 <a:solidFill>
                   <a:srgbClr val="7A869C"/>
                 </a:solidFill>
-                <a:latin typeface="나눔고딕코딩"/>
-                <a:ea typeface="나눔고딕코딩"/>
-                <a:cs typeface="나눔고딕코딩"/>
+                <a:latin typeface="D2Coding"/>
+                <a:ea typeface="D2Coding"/>
+                <a:cs typeface="D2Coding"/>
               </a:rPr>
               <a:t>1</a:t>
             </a:r>
@@ -20346,9 +20346,9 @@
                 <a:solidFill>
                   <a:srgbClr val="7A869C"/>
                 </a:solidFill>
-                <a:latin typeface="나눔고딕코딩"/>
-                <a:ea typeface="나눔고딕코딩"/>
-                <a:cs typeface="나눔고딕코딩"/>
+                <a:latin typeface="D2Coding"/>
+                <a:ea typeface="D2Coding"/>
+                <a:cs typeface="D2Coding"/>
               </a:rPr>
               <a:t>2</a:t>
             </a:r>
@@ -20364,9 +20364,9 @@
                 <a:solidFill>
                   <a:srgbClr val="7A869C"/>
                 </a:solidFill>
-                <a:latin typeface="나눔고딕코딩"/>
-                <a:ea typeface="나눔고딕코딩"/>
-                <a:cs typeface="나눔고딕코딩"/>
+                <a:latin typeface="D2Coding"/>
+                <a:ea typeface="D2Coding"/>
+                <a:cs typeface="D2Coding"/>
               </a:rPr>
               <a:t>3</a:t>
             </a:r>
@@ -20382,9 +20382,9 @@
                 <a:solidFill>
                   <a:srgbClr val="7A869C"/>
                 </a:solidFill>
-                <a:latin typeface="나눔고딕코딩"/>
-                <a:ea typeface="나눔고딕코딩"/>
-                <a:cs typeface="나눔고딕코딩"/>
+                <a:latin typeface="D2Coding"/>
+                <a:ea typeface="D2Coding"/>
+                <a:cs typeface="D2Coding"/>
               </a:rPr>
               <a:t>4</a:t>
             </a:r>
@@ -20400,9 +20400,9 @@
                 <a:solidFill>
                   <a:srgbClr val="7A869C"/>
                 </a:solidFill>
-                <a:latin typeface="나눔고딕코딩"/>
-                <a:ea typeface="나눔고딕코딩"/>
-                <a:cs typeface="나눔고딕코딩"/>
+                <a:latin typeface="D2Coding"/>
+                <a:ea typeface="D2Coding"/>
+                <a:cs typeface="D2Coding"/>
               </a:rPr>
               <a:t>5</a:t>
             </a:r>
@@ -20441,9 +20441,9 @@
                 <a:solidFill>
                   <a:srgbClr val="E6EAF2"/>
                 </a:solidFill>
-                <a:latin typeface="나눔고딕코딩"/>
-                <a:ea typeface="나눔고딕코딩"/>
-                <a:cs typeface="나눔고딕코딩"/>
+                <a:latin typeface="D2Coding"/>
+                <a:ea typeface="D2Coding"/>
+                <a:cs typeface="D2Coding"/>
               </a:rPr>
               <a:t>SHOW VARIABLES LIKE 'character_set%';</a:t>
             </a:r>
@@ -20459,9 +20459,9 @@
                 <a:solidFill>
                   <a:srgbClr val="E6EAF2"/>
                 </a:solidFill>
-                <a:latin typeface="나눔고딕코딩"/>
-                <a:ea typeface="나눔고딕코딩"/>
-                <a:cs typeface="나눔고딕코딩"/>
+                <a:latin typeface="D2Coding"/>
+                <a:ea typeface="D2Coding"/>
+                <a:cs typeface="D2Coding"/>
               </a:rPr>
               <a:t/>
             </a:r>
@@ -20477,9 +20477,9 @@
                 <a:solidFill>
                   <a:srgbClr val="E6EAF2"/>
                 </a:solidFill>
-                <a:latin typeface="나눔고딕코딩"/>
-                <a:ea typeface="나눔고딕코딩"/>
-                <a:cs typeface="나눔고딕코딩"/>
+                <a:latin typeface="D2Coding"/>
+                <a:ea typeface="D2Coding"/>
+                <a:cs typeface="D2Coding"/>
               </a:rPr>
               <a:t>CREATE DATABASE IF NOT EXISTS daon</a:t>
             </a:r>
@@ -20495,9 +20495,9 @@
                 <a:solidFill>
                   <a:srgbClr val="E6EAF2"/>
                 </a:solidFill>
-                <a:latin typeface="나눔고딕코딩"/>
-                <a:ea typeface="나눔고딕코딩"/>
-                <a:cs typeface="나눔고딕코딩"/>
+                <a:latin typeface="D2Coding"/>
+                <a:ea typeface="D2Coding"/>
+                <a:cs typeface="D2Coding"/>
               </a:rPr>
               <a:t>  DEFAULT CHARACTER SET utf8mb4;</a:t>
             </a:r>
@@ -20513,9 +20513,9 @@
                 <a:solidFill>
                   <a:srgbClr val="E6EAF2"/>
                 </a:solidFill>
-                <a:latin typeface="나눔고딕코딩"/>
-                <a:ea typeface="나눔고딕코딩"/>
-                <a:cs typeface="나눔고딕코딩"/>
+                <a:latin typeface="D2Coding"/>
+                <a:ea typeface="D2Coding"/>
+                <a:cs typeface="D2Coding"/>
               </a:rPr>
               <a:t>USE daon;</a:t>
             </a:r>
@@ -28503,9 +28503,9 @@
                 <a:solidFill>
                   <a:srgbClr val="7A869C"/>
                 </a:solidFill>
-                <a:latin typeface="나눔고딕코딩"/>
-                <a:ea typeface="나눔고딕코딩"/>
-                <a:cs typeface="나눔고딕코딩"/>
+                <a:latin typeface="D2Coding"/>
+                <a:ea typeface="D2Coding"/>
+                <a:cs typeface="D2Coding"/>
               </a:rPr>
               <a:t>1</a:t>
             </a:r>
@@ -28521,9 +28521,9 @@
                 <a:solidFill>
                   <a:srgbClr val="7A869C"/>
                 </a:solidFill>
-                <a:latin typeface="나눔고딕코딩"/>
-                <a:ea typeface="나눔고딕코딩"/>
-                <a:cs typeface="나눔고딕코딩"/>
+                <a:latin typeface="D2Coding"/>
+                <a:ea typeface="D2Coding"/>
+                <a:cs typeface="D2Coding"/>
               </a:rPr>
               <a:t>2</a:t>
             </a:r>
@@ -28539,9 +28539,9 @@
                 <a:solidFill>
                   <a:srgbClr val="7A869C"/>
                 </a:solidFill>
-                <a:latin typeface="나눔고딕코딩"/>
-                <a:ea typeface="나눔고딕코딩"/>
-                <a:cs typeface="나눔고딕코딩"/>
+                <a:latin typeface="D2Coding"/>
+                <a:ea typeface="D2Coding"/>
+                <a:cs typeface="D2Coding"/>
               </a:rPr>
               <a:t>3</a:t>
             </a:r>
@@ -28557,9 +28557,9 @@
                 <a:solidFill>
                   <a:srgbClr val="7A869C"/>
                 </a:solidFill>
-                <a:latin typeface="나눔고딕코딩"/>
-                <a:ea typeface="나눔고딕코딩"/>
-                <a:cs typeface="나눔고딕코딩"/>
+                <a:latin typeface="D2Coding"/>
+                <a:ea typeface="D2Coding"/>
+                <a:cs typeface="D2Coding"/>
               </a:rPr>
               <a:t>4</a:t>
             </a:r>
@@ -28575,9 +28575,9 @@
                 <a:solidFill>
                   <a:srgbClr val="7A869C"/>
                 </a:solidFill>
-                <a:latin typeface="나눔고딕코딩"/>
-                <a:ea typeface="나눔고딕코딩"/>
-                <a:cs typeface="나눔고딕코딩"/>
+                <a:latin typeface="D2Coding"/>
+                <a:ea typeface="D2Coding"/>
+                <a:cs typeface="D2Coding"/>
               </a:rPr>
               <a:t>5</a:t>
             </a:r>
@@ -28593,9 +28593,9 @@
                 <a:solidFill>
                   <a:srgbClr val="7A869C"/>
                 </a:solidFill>
-                <a:latin typeface="나눔고딕코딩"/>
-                <a:ea typeface="나눔고딕코딩"/>
-                <a:cs typeface="나눔고딕코딩"/>
+                <a:latin typeface="D2Coding"/>
+                <a:ea typeface="D2Coding"/>
+                <a:cs typeface="D2Coding"/>
               </a:rPr>
               <a:t>6</a:t>
             </a:r>
@@ -28611,9 +28611,9 @@
                 <a:solidFill>
                   <a:srgbClr val="7A869C"/>
                 </a:solidFill>
-                <a:latin typeface="나눔고딕코딩"/>
-                <a:ea typeface="나눔고딕코딩"/>
-                <a:cs typeface="나눔고딕코딩"/>
+                <a:latin typeface="D2Coding"/>
+                <a:ea typeface="D2Coding"/>
+                <a:cs typeface="D2Coding"/>
               </a:rPr>
               <a:t>7</a:t>
             </a:r>
@@ -28629,9 +28629,9 @@
                 <a:solidFill>
                   <a:srgbClr val="7A869C"/>
                 </a:solidFill>
-                <a:latin typeface="나눔고딕코딩"/>
-                <a:ea typeface="나눔고딕코딩"/>
-                <a:cs typeface="나눔고딕코딩"/>
+                <a:latin typeface="D2Coding"/>
+                <a:ea typeface="D2Coding"/>
+                <a:cs typeface="D2Coding"/>
               </a:rPr>
               <a:t>8</a:t>
             </a:r>
@@ -28647,9 +28647,9 @@
                 <a:solidFill>
                   <a:srgbClr val="7A869C"/>
                 </a:solidFill>
-                <a:latin typeface="나눔고딕코딩"/>
-                <a:ea typeface="나눔고딕코딩"/>
-                <a:cs typeface="나눔고딕코딩"/>
+                <a:latin typeface="D2Coding"/>
+                <a:ea typeface="D2Coding"/>
+                <a:cs typeface="D2Coding"/>
               </a:rPr>
               <a:t>9</a:t>
             </a:r>
@@ -28688,9 +28688,9 @@
                 <a:solidFill>
                   <a:srgbClr val="E6EAF2"/>
                 </a:solidFill>
-                <a:latin typeface="나눔고딕코딩"/>
-                <a:ea typeface="나눔고딕코딩"/>
-                <a:cs typeface="나눔고딕코딩"/>
+                <a:latin typeface="D2Coding"/>
+                <a:ea typeface="D2Coding"/>
+                <a:cs typeface="D2Coding"/>
               </a:rPr>
               <a:t>SELECT VERSION();</a:t>
             </a:r>
@@ -28706,9 +28706,9 @@
                 <a:solidFill>
                   <a:srgbClr val="E6EAF2"/>
                 </a:solidFill>
-                <a:latin typeface="나눔고딕코딩"/>
-                <a:ea typeface="나눔고딕코딩"/>
-                <a:cs typeface="나눔고딕코딩"/>
+                <a:latin typeface="D2Coding"/>
+                <a:ea typeface="D2Coding"/>
+                <a:cs typeface="D2Coding"/>
               </a:rPr>
               <a:t/>
             </a:r>
@@ -28724,9 +28724,9 @@
                 <a:solidFill>
                   <a:srgbClr val="E6EAF2"/>
                 </a:solidFill>
-                <a:latin typeface="나눔고딕코딩"/>
-                <a:ea typeface="나눔고딕코딩"/>
-                <a:cs typeface="나눔고딕코딩"/>
+                <a:latin typeface="D2Coding"/>
+                <a:ea typeface="D2Coding"/>
+                <a:cs typeface="D2Coding"/>
               </a:rPr>
               <a:t>SHOW DATABASES;</a:t>
             </a:r>
@@ -28742,9 +28742,9 @@
                 <a:solidFill>
                   <a:srgbClr val="E6EAF2"/>
                 </a:solidFill>
-                <a:latin typeface="나눔고딕코딩"/>
-                <a:ea typeface="나눔고딕코딩"/>
-                <a:cs typeface="나눔고딕코딩"/>
+                <a:latin typeface="D2Coding"/>
+                <a:ea typeface="D2Coding"/>
+                <a:cs typeface="D2Coding"/>
               </a:rPr>
               <a:t/>
             </a:r>
@@ -28760,9 +28760,9 @@
                 <a:solidFill>
                   <a:srgbClr val="E6EAF2"/>
                 </a:solidFill>
-                <a:latin typeface="나눔고딕코딩"/>
-                <a:ea typeface="나눔고딕코딩"/>
-                <a:cs typeface="나눔고딕코딩"/>
+                <a:latin typeface="D2Coding"/>
+                <a:ea typeface="D2Coding"/>
+                <a:cs typeface="D2Coding"/>
               </a:rPr>
               <a:t>CREATE DATABASE daon DEFAULT CHARACTER SET utf8mb4;</a:t>
             </a:r>
@@ -28778,9 +28778,9 @@
                 <a:solidFill>
                   <a:srgbClr val="E6EAF2"/>
                 </a:solidFill>
-                <a:latin typeface="나눔고딕코딩"/>
-                <a:ea typeface="나눔고딕코딩"/>
-                <a:cs typeface="나눔고딕코딩"/>
+                <a:latin typeface="D2Coding"/>
+                <a:ea typeface="D2Coding"/>
+                <a:cs typeface="D2Coding"/>
               </a:rPr>
               <a:t/>
             </a:r>
@@ -28796,9 +28796,9 @@
                 <a:solidFill>
                   <a:srgbClr val="E6EAF2"/>
                 </a:solidFill>
-                <a:latin typeface="나눔고딕코딩"/>
-                <a:ea typeface="나눔고딕코딩"/>
-                <a:cs typeface="나눔고딕코딩"/>
+                <a:latin typeface="D2Coding"/>
+                <a:ea typeface="D2Coding"/>
+                <a:cs typeface="D2Coding"/>
               </a:rPr>
               <a:t>USE daon;</a:t>
             </a:r>
@@ -28814,9 +28814,9 @@
                 <a:solidFill>
                   <a:srgbClr val="E6EAF2"/>
                 </a:solidFill>
-                <a:latin typeface="나눔고딕코딩"/>
-                <a:ea typeface="나눔고딕코딩"/>
-                <a:cs typeface="나눔고딕코딩"/>
+                <a:latin typeface="D2Coding"/>
+                <a:ea typeface="D2Coding"/>
+                <a:cs typeface="D2Coding"/>
               </a:rPr>
               <a:t/>
             </a:r>
@@ -28832,9 +28832,9 @@
                 <a:solidFill>
                   <a:srgbClr val="E6EAF2"/>
                 </a:solidFill>
-                <a:latin typeface="나눔고딕코딩"/>
-                <a:ea typeface="나눔고딕코딩"/>
-                <a:cs typeface="나눔고딕코딩"/>
+                <a:latin typeface="D2Coding"/>
+                <a:ea typeface="D2Coding"/>
+                <a:cs typeface="D2Coding"/>
               </a:rPr>
               <a:t>SELECT COUNT(*) FROM orders;</a:t>
             </a:r>
@@ -35687,9 +35687,9 @@
                 <a:solidFill>
                   <a:srgbClr val="E6EAF2"/>
                 </a:solidFill>
-                <a:latin typeface="나눔고딕코딩"/>
-                <a:ea typeface="나눔고딕코딩"/>
-                <a:cs typeface="나눔고딕코딩"/>
+                <a:latin typeface="D2Coding"/>
+                <a:ea typeface="D2Coding"/>
+                <a:cs typeface="D2Coding"/>
               </a:rPr>
               <a:t>SELECT VERSION();</a:t>
             </a:r>
@@ -35906,9 +35906,9 @@
                 <a:solidFill>
                   <a:srgbClr val="E6EAF2"/>
                 </a:solidFill>
-                <a:latin typeface="나눔고딕코딩"/>
-                <a:ea typeface="나눔고딕코딩"/>
-                <a:cs typeface="나눔고딕코딩"/>
+                <a:latin typeface="D2Coding"/>
+                <a:ea typeface="D2Coding"/>
+                <a:cs typeface="D2Coding"/>
               </a:rPr>
               <a:t>SHOW DATABASES;</a:t>
             </a:r>
@@ -36125,9 +36125,9 @@
                 <a:solidFill>
                   <a:srgbClr val="E6EAF2"/>
                 </a:solidFill>
-                <a:latin typeface="나눔고딕코딩"/>
-                <a:ea typeface="나눔고딕코딩"/>
-                <a:cs typeface="나눔고딕코딩"/>
+                <a:latin typeface="D2Coding"/>
+                <a:ea typeface="D2Coding"/>
+                <a:cs typeface="D2Coding"/>
               </a:rPr>
               <a:t>CREATE DATABASE daon DEFAULT CHARACTER SET utf8mb4;</a:t>
             </a:r>
@@ -36344,9 +36344,9 @@
                 <a:solidFill>
                   <a:srgbClr val="E6EAF2"/>
                 </a:solidFill>
-                <a:latin typeface="나눔고딕코딩"/>
-                <a:ea typeface="나눔고딕코딩"/>
-                <a:cs typeface="나눔고딕코딩"/>
+                <a:latin typeface="D2Coding"/>
+                <a:ea typeface="D2Coding"/>
+                <a:cs typeface="D2Coding"/>
               </a:rPr>
               <a:t>USE daon;</a:t>
             </a:r>
@@ -36563,9 +36563,9 @@
                 <a:solidFill>
                   <a:srgbClr val="E6EAF2"/>
                 </a:solidFill>
-                <a:latin typeface="나눔고딕코딩"/>
-                <a:ea typeface="나눔고딕코딩"/>
-                <a:cs typeface="나눔고딕코딩"/>
+                <a:latin typeface="D2Coding"/>
+                <a:ea typeface="D2Coding"/>
+                <a:cs typeface="D2Coding"/>
               </a:rPr>
               <a:t>SELECT USER(), DATABASE();</a:t>
             </a:r>
@@ -36782,9 +36782,9 @@
                 <a:solidFill>
                   <a:srgbClr val="E6EAF2"/>
                 </a:solidFill>
-                <a:latin typeface="나눔고딕코딩"/>
-                <a:ea typeface="나눔고딕코딩"/>
-                <a:cs typeface="나눔고딕코딩"/>
+                <a:latin typeface="D2Coding"/>
+                <a:ea typeface="D2Coding"/>
+                <a:cs typeface="D2Coding"/>
               </a:rPr>
               <a:t>SHOW TABLES;</a:t>
             </a:r>
@@ -37001,9 +37001,9 @@
                 <a:solidFill>
                   <a:srgbClr val="E6EAF2"/>
                 </a:solidFill>
-                <a:latin typeface="나눔고딕코딩"/>
-                <a:ea typeface="나눔고딕코딩"/>
-                <a:cs typeface="나눔고딕코딩"/>
+                <a:latin typeface="D2Coding"/>
+                <a:ea typeface="D2Coding"/>
+                <a:cs typeface="D2Coding"/>
               </a:rPr>
               <a:t>DESC orders;</a:t>
             </a:r>
@@ -37220,9 +37220,9 @@
                 <a:solidFill>
                   <a:srgbClr val="E6EAF2"/>
                 </a:solidFill>
-                <a:latin typeface="나눔고딕코딩"/>
-                <a:ea typeface="나눔고딕코딩"/>
-                <a:cs typeface="나눔고딕코딩"/>
+                <a:latin typeface="D2Coding"/>
+                <a:ea typeface="D2Coding"/>
+                <a:cs typeface="D2Coding"/>
               </a:rPr>
               <a:t>SELECT COUNT(*) FROM orders;</a:t>
             </a:r>
@@ -40747,9 +40747,9 @@
                 <a:solidFill>
                   <a:srgbClr val="7A869C"/>
                 </a:solidFill>
-                <a:latin typeface="나눔고딕코딩"/>
-                <a:ea typeface="나눔고딕코딩"/>
-                <a:cs typeface="나눔고딕코딩"/>
+                <a:latin typeface="D2Coding"/>
+                <a:ea typeface="D2Coding"/>
+                <a:cs typeface="D2Coding"/>
               </a:rPr>
               <a:t>1</a:t>
             </a:r>
@@ -40765,9 +40765,9 @@
                 <a:solidFill>
                   <a:srgbClr val="7A869C"/>
                 </a:solidFill>
-                <a:latin typeface="나눔고딕코딩"/>
-                <a:ea typeface="나눔고딕코딩"/>
-                <a:cs typeface="나눔고딕코딩"/>
+                <a:latin typeface="D2Coding"/>
+                <a:ea typeface="D2Coding"/>
+                <a:cs typeface="D2Coding"/>
               </a:rPr>
               <a:t>2</a:t>
             </a:r>
@@ -40783,9 +40783,9 @@
                 <a:solidFill>
                   <a:srgbClr val="7A869C"/>
                 </a:solidFill>
-                <a:latin typeface="나눔고딕코딩"/>
-                <a:ea typeface="나눔고딕코딩"/>
-                <a:cs typeface="나눔고딕코딩"/>
+                <a:latin typeface="D2Coding"/>
+                <a:ea typeface="D2Coding"/>
+                <a:cs typeface="D2Coding"/>
               </a:rPr>
               <a:t>3</a:t>
             </a:r>
@@ -40801,9 +40801,9 @@
                 <a:solidFill>
                   <a:srgbClr val="7A869C"/>
                 </a:solidFill>
-                <a:latin typeface="나눔고딕코딩"/>
-                <a:ea typeface="나눔고딕코딩"/>
-                <a:cs typeface="나눔고딕코딩"/>
+                <a:latin typeface="D2Coding"/>
+                <a:ea typeface="D2Coding"/>
+                <a:cs typeface="D2Coding"/>
               </a:rPr>
               <a:t>4</a:t>
             </a:r>
@@ -40819,9 +40819,9 @@
                 <a:solidFill>
                   <a:srgbClr val="7A869C"/>
                 </a:solidFill>
-                <a:latin typeface="나눔고딕코딩"/>
-                <a:ea typeface="나눔고딕코딩"/>
-                <a:cs typeface="나눔고딕코딩"/>
+                <a:latin typeface="D2Coding"/>
+                <a:ea typeface="D2Coding"/>
+                <a:cs typeface="D2Coding"/>
               </a:rPr>
               <a:t>5</a:t>
             </a:r>
@@ -40837,9 +40837,9 @@
                 <a:solidFill>
                   <a:srgbClr val="7A869C"/>
                 </a:solidFill>
-                <a:latin typeface="나눔고딕코딩"/>
-                <a:ea typeface="나눔고딕코딩"/>
-                <a:cs typeface="나눔고딕코딩"/>
+                <a:latin typeface="D2Coding"/>
+                <a:ea typeface="D2Coding"/>
+                <a:cs typeface="D2Coding"/>
               </a:rPr>
               <a:t>6</a:t>
             </a:r>
@@ -40855,9 +40855,9 @@
                 <a:solidFill>
                   <a:srgbClr val="7A869C"/>
                 </a:solidFill>
-                <a:latin typeface="나눔고딕코딩"/>
-                <a:ea typeface="나눔고딕코딩"/>
-                <a:cs typeface="나눔고딕코딩"/>
+                <a:latin typeface="D2Coding"/>
+                <a:ea typeface="D2Coding"/>
+                <a:cs typeface="D2Coding"/>
               </a:rPr>
               <a:t>7</a:t>
             </a:r>
@@ -40873,9 +40873,9 @@
                 <a:solidFill>
                   <a:srgbClr val="7A869C"/>
                 </a:solidFill>
-                <a:latin typeface="나눔고딕코딩"/>
-                <a:ea typeface="나눔고딕코딩"/>
-                <a:cs typeface="나눔고딕코딩"/>
+                <a:latin typeface="D2Coding"/>
+                <a:ea typeface="D2Coding"/>
+                <a:cs typeface="D2Coding"/>
               </a:rPr>
               <a:t>8</a:t>
             </a:r>
@@ -40891,9 +40891,9 @@
                 <a:solidFill>
                   <a:srgbClr val="7A869C"/>
                 </a:solidFill>
-                <a:latin typeface="나눔고딕코딩"/>
-                <a:ea typeface="나눔고딕코딩"/>
-                <a:cs typeface="나눔고딕코딩"/>
+                <a:latin typeface="D2Coding"/>
+                <a:ea typeface="D2Coding"/>
+                <a:cs typeface="D2Coding"/>
               </a:rPr>
               <a:t>9</a:t>
             </a:r>
@@ -40909,9 +40909,9 @@
                 <a:solidFill>
                   <a:srgbClr val="7A869C"/>
                 </a:solidFill>
-                <a:latin typeface="나눔고딕코딩"/>
-                <a:ea typeface="나눔고딕코딩"/>
-                <a:cs typeface="나눔고딕코딩"/>
+                <a:latin typeface="D2Coding"/>
+                <a:ea typeface="D2Coding"/>
+                <a:cs typeface="D2Coding"/>
               </a:rPr>
               <a:t>10</a:t>
             </a:r>
@@ -40950,9 +40950,9 @@
                 <a:solidFill>
                   <a:srgbClr val="E6EAF2"/>
                 </a:solidFill>
-                <a:latin typeface="나눔고딕코딩"/>
-                <a:ea typeface="나눔고딕코딩"/>
-                <a:cs typeface="나눔고딕코딩"/>
+                <a:latin typeface="D2Coding"/>
+                <a:ea typeface="D2Coding"/>
+                <a:cs typeface="D2Coding"/>
               </a:rPr>
               <a:t>SELECT VERSION();</a:t>
             </a:r>
@@ -40968,9 +40968,9 @@
                 <a:solidFill>
                   <a:srgbClr val="E6EAF2"/>
                 </a:solidFill>
-                <a:latin typeface="나눔고딕코딩"/>
-                <a:ea typeface="나눔고딕코딩"/>
-                <a:cs typeface="나눔고딕코딩"/>
+                <a:latin typeface="D2Coding"/>
+                <a:ea typeface="D2Coding"/>
+                <a:cs typeface="D2Coding"/>
               </a:rPr>
               <a:t/>
             </a:r>
@@ -40986,9 +40986,9 @@
                 <a:solidFill>
                   <a:srgbClr val="E6EAF2"/>
                 </a:solidFill>
-                <a:latin typeface="나눔고딕코딩"/>
-                <a:ea typeface="나눔고딕코딩"/>
-                <a:cs typeface="나눔고딕코딩"/>
+                <a:latin typeface="D2Coding"/>
+                <a:ea typeface="D2Coding"/>
+                <a:cs typeface="D2Coding"/>
               </a:rPr>
               <a:t>SHOW DATABASES;</a:t>
             </a:r>
@@ -41004,9 +41004,9 @@
                 <a:solidFill>
                   <a:srgbClr val="E6EAF2"/>
                 </a:solidFill>
-                <a:latin typeface="나눔고딕코딩"/>
-                <a:ea typeface="나눔고딕코딩"/>
-                <a:cs typeface="나눔고딕코딩"/>
+                <a:latin typeface="D2Coding"/>
+                <a:ea typeface="D2Coding"/>
+                <a:cs typeface="D2Coding"/>
               </a:rPr>
               <a:t/>
             </a:r>
@@ -41022,9 +41022,9 @@
                 <a:solidFill>
                   <a:srgbClr val="E6EAF2"/>
                 </a:solidFill>
-                <a:latin typeface="나눔고딕코딩"/>
-                <a:ea typeface="나눔고딕코딩"/>
-                <a:cs typeface="나눔고딕코딩"/>
+                <a:latin typeface="D2Coding"/>
+                <a:ea typeface="D2Coding"/>
+                <a:cs typeface="D2Coding"/>
               </a:rPr>
               <a:t>CREATE DATABASE IF NOT EXISTS daon</a:t>
             </a:r>
@@ -41040,9 +41040,9 @@
                 <a:solidFill>
                   <a:srgbClr val="E6EAF2"/>
                 </a:solidFill>
-                <a:latin typeface="나눔고딕코딩"/>
-                <a:ea typeface="나눔고딕코딩"/>
-                <a:cs typeface="나눔고딕코딩"/>
+                <a:latin typeface="D2Coding"/>
+                <a:ea typeface="D2Coding"/>
+                <a:cs typeface="D2Coding"/>
               </a:rPr>
               <a:t>  DEFAULT CHARACTER SET utf8mb4;</a:t>
             </a:r>
@@ -41058,9 +41058,9 @@
                 <a:solidFill>
                   <a:srgbClr val="E6EAF2"/>
                 </a:solidFill>
-                <a:latin typeface="나눔고딕코딩"/>
-                <a:ea typeface="나눔고딕코딩"/>
-                <a:cs typeface="나눔고딕코딩"/>
+                <a:latin typeface="D2Coding"/>
+                <a:ea typeface="D2Coding"/>
+                <a:cs typeface="D2Coding"/>
               </a:rPr>
               <a:t/>
             </a:r>
@@ -41076,9 +41076,9 @@
                 <a:solidFill>
                   <a:srgbClr val="E6EAF2"/>
                 </a:solidFill>
-                <a:latin typeface="나눔고딕코딩"/>
-                <a:ea typeface="나눔고딕코딩"/>
-                <a:cs typeface="나눔고딕코딩"/>
+                <a:latin typeface="D2Coding"/>
+                <a:ea typeface="D2Coding"/>
+                <a:cs typeface="D2Coding"/>
               </a:rPr>
               <a:t>USE daon;</a:t>
             </a:r>
@@ -41094,9 +41094,9 @@
                 <a:solidFill>
                   <a:srgbClr val="E6EAF2"/>
                 </a:solidFill>
-                <a:latin typeface="나눔고딕코딩"/>
-                <a:ea typeface="나눔고딕코딩"/>
-                <a:cs typeface="나눔고딕코딩"/>
+                <a:latin typeface="D2Coding"/>
+                <a:ea typeface="D2Coding"/>
+                <a:cs typeface="D2Coding"/>
               </a:rPr>
               <a:t/>
             </a:r>
@@ -41112,9 +41112,9 @@
                 <a:solidFill>
                   <a:srgbClr val="E6EAF2"/>
                 </a:solidFill>
-                <a:latin typeface="나눔고딕코딩"/>
-                <a:ea typeface="나눔고딕코딩"/>
-                <a:cs typeface="나눔고딕코딩"/>
+                <a:latin typeface="D2Coding"/>
+                <a:ea typeface="D2Coding"/>
+                <a:cs typeface="D2Coding"/>
               </a:rPr>
               <a:t>SELECT DATABASE();</a:t>
             </a:r>
